--- a/doc/Presentation_intro.pptx
+++ b/doc/Presentation_intro.pptx
@@ -111,6 +111,11 @@
       </a:defRPr>
     </a:lvl9pPr>
   </p:defaultTextStyle>
+  <p:extLst>
+    <p:ext uri="{EFAFB233-063F-42B5-8137-9DF3F51BA10A}">
+      <p15:sldGuideLst xmlns:p15="http://schemas.microsoft.com/office/powerpoint/2012/main"/>
+    </p:ext>
+  </p:extLst>
 </p:presentation>
 </file>
 
@@ -196,7 +201,7 @@
           <a:p>
             <a:fld id="{A9065F20-80E3-45A3-BCD9-1BA8FFB75EDD}" type="datetimeFigureOut">
               <a:rPr lang="en-ZA" smtClean="0"/>
-              <a:t>2026/04/14</a:t>
+              <a:t>2026/05/16</a:t>
             </a:fld>
             <a:endParaRPr lang="en-ZA"/>
           </a:p>
@@ -697,7 +702,7 @@
           <a:p>
             <a:fld id="{DEECBDE8-5F0B-47F8-ACC0-FF0FFAA27E2E}" type="datetimeFigureOut">
               <a:rPr lang="en-ZA" smtClean="0"/>
-              <a:t>2026/04/14</a:t>
+              <a:t>2026/05/16</a:t>
             </a:fld>
             <a:endParaRPr lang="en-ZA"/>
           </a:p>
@@ -897,7 +902,7 @@
           <a:p>
             <a:fld id="{DEECBDE8-5F0B-47F8-ACC0-FF0FFAA27E2E}" type="datetimeFigureOut">
               <a:rPr lang="en-ZA" smtClean="0"/>
-              <a:t>2026/04/14</a:t>
+              <a:t>2026/05/16</a:t>
             </a:fld>
             <a:endParaRPr lang="en-ZA"/>
           </a:p>
@@ -1107,7 +1112,7 @@
           <a:p>
             <a:fld id="{DEECBDE8-5F0B-47F8-ACC0-FF0FFAA27E2E}" type="datetimeFigureOut">
               <a:rPr lang="en-ZA" smtClean="0"/>
-              <a:t>2026/04/14</a:t>
+              <a:t>2026/05/16</a:t>
             </a:fld>
             <a:endParaRPr lang="en-ZA"/>
           </a:p>
@@ -1307,7 +1312,7 @@
           <a:p>
             <a:fld id="{DEECBDE8-5F0B-47F8-ACC0-FF0FFAA27E2E}" type="datetimeFigureOut">
               <a:rPr lang="en-ZA" smtClean="0"/>
-              <a:t>2026/04/14</a:t>
+              <a:t>2026/05/16</a:t>
             </a:fld>
             <a:endParaRPr lang="en-ZA"/>
           </a:p>
@@ -1583,7 +1588,7 @@
           <a:p>
             <a:fld id="{DEECBDE8-5F0B-47F8-ACC0-FF0FFAA27E2E}" type="datetimeFigureOut">
               <a:rPr lang="en-ZA" smtClean="0"/>
-              <a:t>2026/04/14</a:t>
+              <a:t>2026/05/16</a:t>
             </a:fld>
             <a:endParaRPr lang="en-ZA"/>
           </a:p>
@@ -1851,7 +1856,7 @@
           <a:p>
             <a:fld id="{DEECBDE8-5F0B-47F8-ACC0-FF0FFAA27E2E}" type="datetimeFigureOut">
               <a:rPr lang="en-ZA" smtClean="0"/>
-              <a:t>2026/04/14</a:t>
+              <a:t>2026/05/16</a:t>
             </a:fld>
             <a:endParaRPr lang="en-ZA"/>
           </a:p>
@@ -2266,7 +2271,7 @@
           <a:p>
             <a:fld id="{DEECBDE8-5F0B-47F8-ACC0-FF0FFAA27E2E}" type="datetimeFigureOut">
               <a:rPr lang="en-ZA" smtClean="0"/>
-              <a:t>2026/04/14</a:t>
+              <a:t>2026/05/16</a:t>
             </a:fld>
             <a:endParaRPr lang="en-ZA"/>
           </a:p>
@@ -2408,7 +2413,7 @@
           <a:p>
             <a:fld id="{DEECBDE8-5F0B-47F8-ACC0-FF0FFAA27E2E}" type="datetimeFigureOut">
               <a:rPr lang="en-ZA" smtClean="0"/>
-              <a:t>2026/04/14</a:t>
+              <a:t>2026/05/16</a:t>
             </a:fld>
             <a:endParaRPr lang="en-ZA"/>
           </a:p>
@@ -2521,7 +2526,7 @@
           <a:p>
             <a:fld id="{DEECBDE8-5F0B-47F8-ACC0-FF0FFAA27E2E}" type="datetimeFigureOut">
               <a:rPr lang="en-ZA" smtClean="0"/>
-              <a:t>2026/04/14</a:t>
+              <a:t>2026/05/16</a:t>
             </a:fld>
             <a:endParaRPr lang="en-ZA"/>
           </a:p>
@@ -2834,7 +2839,7 @@
           <a:p>
             <a:fld id="{DEECBDE8-5F0B-47F8-ACC0-FF0FFAA27E2E}" type="datetimeFigureOut">
               <a:rPr lang="en-ZA" smtClean="0"/>
-              <a:t>2026/04/14</a:t>
+              <a:t>2026/05/16</a:t>
             </a:fld>
             <a:endParaRPr lang="en-ZA"/>
           </a:p>
@@ -3123,7 +3128,7 @@
           <a:p>
             <a:fld id="{DEECBDE8-5F0B-47F8-ACC0-FF0FFAA27E2E}" type="datetimeFigureOut">
               <a:rPr lang="en-ZA" smtClean="0"/>
-              <a:t>2026/04/14</a:t>
+              <a:t>2026/05/16</a:t>
             </a:fld>
             <a:endParaRPr lang="en-ZA"/>
           </a:p>
@@ -3366,7 +3371,7 @@
           <a:p>
             <a:fld id="{DEECBDE8-5F0B-47F8-ACC0-FF0FFAA27E2E}" type="datetimeFigureOut">
               <a:rPr lang="en-ZA" smtClean="0"/>
-              <a:t>2026/04/14</a:t>
+              <a:t>2026/05/16</a:t>
             </a:fld>
             <a:endParaRPr lang="en-ZA"/>
           </a:p>
@@ -3826,8 +3831,9 @@
             <a:r>
               <a:rPr lang="en-ZA" b="1" dirty="0">
                 <a:solidFill>
-                  <a:schemeClr val="bg1">
-                    <a:lumMod val="95000"/>
+                  <a:schemeClr val="accent1">
+                    <a:lumMod val="60000"/>
+                    <a:lumOff val="40000"/>
                   </a:schemeClr>
                 </a:solidFill>
               </a:rPr>
@@ -3887,7 +3893,42 @@
           <a:bodyPr/>
           <a:lstStyle/>
           <a:p>
-            <a:endParaRPr lang="en-ZA" dirty="0"/>
+            <a:r>
+              <a:rPr lang="en-ZA" dirty="0">
+                <a:solidFill>
+                  <a:schemeClr val="accent1"/>
+                </a:solidFill>
+              </a:rPr>
+              <a:t>Outline</a:t>
+            </a:r>
+          </a:p>
+        </p:txBody>
+      </p:sp>
+      <p:sp>
+        <p:nvSpPr>
+          <p:cNvPr id="3" name="Content Placeholder 2">
+            <a:extLst>
+              <a:ext uri="{FF2B5EF4-FFF2-40B4-BE49-F238E27FC236}">
+                <a16:creationId xmlns:a16="http://schemas.microsoft.com/office/drawing/2014/main" id="{0570CFB0-FC7F-F2D6-45F3-E31441DC42A8}"/>
+              </a:ext>
+            </a:extLst>
+          </p:cNvPr>
+          <p:cNvSpPr>
+            <a:spLocks noGrp="1"/>
+          </p:cNvSpPr>
+          <p:nvPr>
+            <p:ph idx="1"/>
+          </p:nvPr>
+        </p:nvSpPr>
+        <p:spPr/>
+        <p:txBody>
+          <a:bodyPr/>
+          <a:lstStyle/>
+          <a:p>
+            <a:r>
+              <a:rPr lang="en-ZA"/>
+              <a:t> </a:t>
+            </a:r>
           </a:p>
         </p:txBody>
       </p:sp>
